--- a/out/kit-investor.pptx
+++ b/out/kit-investor.pptx
@@ -4,6 +4,9 @@
   <p:sldMasterIdLst>
     <p:sldMasterId id="2147483648" r:id="rId1"/>
   </p:sldMasterIdLst>
+  <p:notesMasterIdLst>
+    <p:notesMasterId r:id="rId14"/>
+  </p:notesMasterIdLst>
   <p:sldIdLst>
     <p:sldId id="256" r:id="rId2"/>
     <p:sldId id="257" r:id="rId3"/>
@@ -18,9 +21,6 @@
     <p:sldId id="266" r:id="rId12"/>
     <p:sldId id="267" r:id="rId13"/>
   </p:sldIdLst>
-  <p:notesMasterIdLst>
-    <p:notesMasterId r:id="rId14"/>
-  </p:notesMasterIdLst>
   <p:sldSz cx="12192000" cy="6858000"/>
   <p:notesSz cx="6858000" cy="12192000"/>
   <p:defaultTextStyle>
@@ -2107,7 +2107,7 @@
             <a:prstDash val="solid"/>
           </a:ln>
           <a:effectLst>
-            <a:outerShdw blurRad="88900" dist="25400" dir="5400000" sx="100000" sy="100000" algn="ctr" rotWithShape="0">
+            <a:outerShdw blurRad="84836" dist="24257" dir="5400000" sx="100000" sy="100000" algn="ctr" rotWithShape="0">
               <a:srgbClr val="000000">
                 <a:alpha val="25000"/>
               </a:srgbClr>
@@ -3715,7 +3715,7 @@
             <a:prstDash val="solid"/>
           </a:ln>
           <a:effectLst>
-            <a:outerShdw blurRad="88900" dist="25400" dir="5400000" sx="100000" sy="100000" algn="ctr" rotWithShape="0">
+            <a:outerShdw blurRad="76835" dist="21971" dir="5400000" sx="100000" sy="100000" algn="ctr" rotWithShape="0">
               <a:srgbClr val="000000">
                 <a:alpha val="25000"/>
               </a:srgbClr>
@@ -5514,9 +5514,9 @@
           </a:solidFill>
           <a:ln/>
           <a:effectLst>
-            <a:outerShdw blurRad="203200" dist="25400" dir="5400000" sx="102000" sy="102000" algn="ctr" rotWithShape="0">
+            <a:outerShdw blurRad="85344" dist="15240" dir="5400000" sx="100840" sy="100840" algn="ctr" rotWithShape="0">
               <a:srgbClr val="000000">
-                <a:alpha val="32000"/>
+                <a:alpha val="28000"/>
               </a:srgbClr>
             </a:outerShdw>
           </a:effectLst>
@@ -5636,9 +5636,9 @@
             </a:solidFill>
             <a:ln/>
             <a:effectLst>
-              <a:outerShdw blurRad="203200" dist="25400" dir="5400000" sx="102000" sy="102000" algn="ctr" rotWithShape="0">
+              <a:outerShdw blurRad="85344" dist="15240" dir="5400000" sx="100840" sy="100840" algn="ctr" rotWithShape="0">
                 <a:srgbClr val="000000">
-                  <a:alpha val="32000"/>
+                  <a:alpha val="28000"/>
                 </a:srgbClr>
               </a:outerShdw>
             </a:effectLst>
@@ -7211,9 +7211,6 @@
               </a:rPr>
               <a:t>法說會紅</a:t>
             </a:r>
-            <a:pPr algn="l" indent="0" marL="0">
-              <a:buNone/>
-            </a:pPr>
             <a:r>
               <a:rPr lang="en-US" sz="900" dirty="0">
                 <a:solidFill>
@@ -8606,9 +8603,6 @@
               </a:rPr>
               <a:t>法說會紅</a:t>
             </a:r>
-            <a:pPr algn="l" indent="0" marL="0">
-              <a:buNone/>
-            </a:pPr>
             <a:r>
               <a:rPr lang="en-US" sz="900" dirty="0">
                 <a:solidFill>
@@ -10379,9 +10373,6 @@
               </a:rPr>
               <a:t>組織</a:t>
             </a:r>
-            <a:pPr algn="ctr" indent="0" marL="0">
-              <a:buNone/>
-            </a:pPr>
             <a:r>
               <a:rPr lang="en-US" sz="1100" dirty="0">
                 <a:solidFill>
@@ -10914,9 +10905,6 @@
               </a:rPr>
               <a:t>法說會紅</a:t>
             </a:r>
-            <a:pPr algn="l" indent="0" marL="0">
-              <a:buNone/>
-            </a:pPr>
             <a:r>
               <a:rPr lang="en-US" sz="900" dirty="0">
                 <a:solidFill>
@@ -13978,9 +13966,6 @@
               </a:rPr>
               <a:t>法說會紅</a:t>
             </a:r>
-            <a:pPr algn="l" indent="0" marL="0">
-              <a:buNone/>
-            </a:pPr>
             <a:r>
               <a:rPr lang="en-US" sz="900" dirty="0">
                 <a:solidFill>
@@ -14210,9 +14195,6 @@
               </a:rPr>
               <a:t>三步驟流程</a:t>
             </a:r>
-            <a:pPr algn="l" indent="0" marL="0">
-              <a:buNone/>
-            </a:pPr>
             <a:r>
               <a:rPr lang="en-US" sz="800" dirty="0">
                 <a:solidFill>
@@ -14636,9 +14618,6 @@
               </a:rPr>
               <a:t>判斷分岔（是／否）</a:t>
             </a:r>
-            <a:pPr algn="l" indent="0" marL="0">
-              <a:buNone/>
-            </a:pPr>
             <a:r>
               <a:rPr lang="en-US" sz="800" dirty="0">
                 <a:solidFill>
@@ -15082,9 +15061,6 @@
               </a:rPr>
               <a:t>例外退回路徑</a:t>
             </a:r>
-            <a:pPr algn="l" indent="0" marL="0">
-              <a:buNone/>
-            </a:pPr>
             <a:r>
               <a:rPr lang="en-US" sz="800" dirty="0">
                 <a:solidFill>
@@ -15477,9 +15453,6 @@
               </a:rPr>
               <a:t>審核迴圈</a:t>
             </a:r>
-            <a:pPr algn="l" indent="0" marL="0">
-              <a:buNone/>
-            </a:pPr>
             <a:r>
               <a:rPr lang="en-US" sz="800" dirty="0">
                 <a:solidFill>
@@ -15909,9 +15882,6 @@
               </a:rPr>
               <a:t>泳道（雙道）</a:t>
             </a:r>
-            <a:pPr algn="l" indent="0" marL="0">
-              <a:buNone/>
-            </a:pPr>
             <a:r>
               <a:rPr lang="en-US" sz="800" dirty="0">
                 <a:solidFill>
@@ -16482,9 +16452,6 @@
               </a:rPr>
               <a:t>平行分流／合流</a:t>
             </a:r>
-            <a:pPr algn="l" indent="0" marL="0">
-              <a:buNone/>
-            </a:pPr>
             <a:r>
               <a:rPr lang="en-US" sz="800" dirty="0">
                 <a:solidFill>
@@ -16984,9 +16951,6 @@
               </a:rPr>
               <a:t>輸入→處理→輸出</a:t>
             </a:r>
-            <a:pPr algn="l" indent="0" marL="0">
-              <a:buNone/>
-            </a:pPr>
             <a:r>
               <a:rPr lang="en-US" sz="800" dirty="0">
                 <a:solidFill>
@@ -17425,9 +17389,6 @@
               </a:rPr>
               <a:t>前後對照</a:t>
             </a:r>
-            <a:pPr algn="l" indent="0" marL="0">
-              <a:buNone/>
-            </a:pPr>
             <a:r>
               <a:rPr lang="en-US" sz="800" dirty="0">
                 <a:solidFill>
@@ -17547,9 +17508,6 @@
                 </a:rPr>
                 <a:t>現況 </a:t>
               </a:r>
-              <a:pPr algn="l" indent="0" marL="0">
-                <a:buNone/>
-              </a:pPr>
               <a:r>
                 <a:rPr lang="en-US" sz="800" dirty="0">
                   <a:solidFill>
@@ -17747,9 +17705,6 @@
                 </a:rPr>
                 <a:t>改善後 </a:t>
               </a:r>
-              <a:pPr algn="l" indent="0" marL="0">
-                <a:buNone/>
-              </a:pPr>
               <a:r>
                 <a:rPr lang="en-US" sz="800" dirty="0">
                   <a:solidFill>
@@ -17886,9 +17841,6 @@
               </a:rPr>
               <a:t>法說會紅</a:t>
             </a:r>
-            <a:pPr algn="l" indent="0" marL="0">
-              <a:buNone/>
-            </a:pPr>
             <a:r>
               <a:rPr lang="en-US" sz="900" dirty="0">
                 <a:solidFill>
@@ -19167,9 +19119,6 @@
               </a:rPr>
               <a:t>大標題文字</a:t>
             </a:r>
-            <a:pPr algn="l" indent="0" marL="0">
-              <a:buNone/>
-            </a:pPr>
             <a:r>
               <a:rPr lang="en-US" sz="1000" dirty="0">
                 <a:solidFill>
@@ -19220,9 +19169,6 @@
               </a:rPr>
               <a:t>副標題・細字主色</a:t>
             </a:r>
-            <a:pPr algn="l" indent="0" marL="0">
-              <a:buNone/>
-            </a:pPr>
             <a:r>
               <a:rPr lang="en-US" sz="1000" dirty="0">
                 <a:solidFill>
@@ -19273,9 +19219,6 @@
               </a:rPr>
               <a:t>標籤與卡片標題</a:t>
             </a:r>
-            <a:pPr algn="l" indent="0" marL="0">
-              <a:buNone/>
-            </a:pPr>
             <a:r>
               <a:rPr lang="en-US" sz="1000" dirty="0">
                 <a:solidFill>
@@ -19326,9 +19269,6 @@
               </a:rPr>
               <a:t>內文說明文字，灰色、行距寬鬆</a:t>
             </a:r>
-            <a:pPr algn="l" indent="0" marL="0">
-              <a:buNone/>
-            </a:pPr>
             <a:r>
               <a:rPr lang="en-US" sz="1000" dirty="0">
                 <a:solidFill>
@@ -21046,9 +20986,6 @@
               </a:rPr>
               <a:t>法說會紅</a:t>
             </a:r>
-            <a:pPr algn="l" indent="0" marL="0">
-              <a:buNone/>
-            </a:pPr>
             <a:r>
               <a:rPr lang="en-US" sz="900" dirty="0">
                 <a:solidFill>
@@ -21280,9 +21217,6 @@
               </a:rPr>
               <a:t>標題＋內文</a:t>
             </a:r>
-            <a:pPr algn="l" indent="0" marL="0">
-              <a:buNone/>
-            </a:pPr>
             <a:r>
               <a:rPr lang="en-US" sz="1000" b="1" dirty="0">
                 <a:solidFill>
@@ -22492,9 +22426,6 @@
               </a:rPr>
               <a:t>法說會紅</a:t>
             </a:r>
-            <a:pPr algn="l" indent="0" marL="0">
-              <a:buNone/>
-            </a:pPr>
             <a:r>
               <a:rPr lang="en-US" sz="900" dirty="0">
                 <a:solidFill>
@@ -24440,9 +24371,6 @@
               </a:rPr>
               <a:t>法說會紅</a:t>
             </a:r>
-            <a:pPr algn="l" indent="0" marL="0">
-              <a:buNone/>
-            </a:pPr>
             <a:r>
               <a:rPr lang="en-US" sz="900" dirty="0">
                 <a:solidFill>
@@ -26261,9 +26189,6 @@
               </a:rPr>
               <a:t>法說會紅</a:t>
             </a:r>
-            <a:pPr algn="l" indent="0" marL="0">
-              <a:buNone/>
-            </a:pPr>
             <a:r>
               <a:rPr lang="en-US" sz="900" dirty="0">
                 <a:solidFill>
@@ -28579,9 +28504,6 @@
               </a:rPr>
               <a:t>法說會紅</a:t>
             </a:r>
-            <a:pPr algn="l" indent="0" marL="0">
-              <a:buNone/>
-            </a:pPr>
             <a:r>
               <a:rPr lang="en-US" sz="900" dirty="0">
                 <a:solidFill>
@@ -30130,9 +30052,6 @@
               </a:rPr>
               <a:t>法說會紅</a:t>
             </a:r>
-            <a:pPr algn="l" indent="0" marL="0">
-              <a:buNone/>
-            </a:pPr>
             <a:r>
               <a:rPr lang="en-US" sz="900" dirty="0">
                 <a:solidFill>
@@ -32231,9 +32150,6 @@
               </a:rPr>
               <a:t>法說會紅</a:t>
             </a:r>
-            <a:pPr algn="l" indent="0" marL="0">
-              <a:buNone/>
-            </a:pPr>
             <a:r>
               <a:rPr lang="en-US" sz="900" dirty="0">
                 <a:solidFill>
